--- a/exports/11_native_charts.pptx
+++ b/exports/11_native_charts.pptx
@@ -108,6 +108,859 @@
     </a:lvl9pPr>
   </p:defaultTextStyle>
 </p:presentation>
+</file>
+
+<file path=ppt/charts/chart1.xml><?xml version="1.0" encoding="utf-8"?>
+<c:chartSpace xmlns:c="http://schemas.openxmlformats.org/drawingml/2006/chart" xmlns:a="http://schemas.openxmlformats.org/drawingml/2006/main" xmlns:r="http://schemas.openxmlformats.org/officeDocument/2006/relationships">
+  <c:date1904 val="0"/>
+  <c:roundedCorners val="1"/>
+  <c:chart>
+    <c:autoTitleDeleted val="1"/>
+    <c:plotArea>
+      <c:layout/>
+      <c:barChart>
+        <c:barDir val="col"/>
+        <c:grouping val="clustered"/>
+        <c:varyColors val="0"/>
+        <c:ser>
+          <c:idx val="0"/>
+          <c:order val="0"/>
+          <c:tx>
+            <c:strRef>
+              <c:f>Sheet1!$B$1</c:f>
+              <c:strCache>
+                <c:ptCount val="1"/>
+                <c:pt idx="0">
+                  <c:v>ARR ($M)</c:v>
+                </c:pt>
+              </c:strCache>
+            </c:strRef>
+          </c:tx>
+          <c:spPr>
+            <a:solidFill>
+              <a:srgbClr val="2563EB"/>
+            </a:solidFill>
+            <a:effectLst/>
+          </c:spPr>
+          <c:invertIfNegative val="0"/>
+          <c:dLbls>
+            <c:numFmt formatCode="#,##0" sourceLinked="0"/>
+            <c:txPr>
+              <a:bodyPr/>
+              <a:lstStyle/>
+              <a:p>
+                <a:pPr>
+                  <a:defRPr b="0" i="0" strike="noStrike" sz="1200" u="none">
+                    <a:solidFill>
+                      <a:srgbClr val="000000"/>
+                    </a:solidFill>
+                    <a:latin typeface="Arial"/>
+                  </a:defRPr>
+                </a:pPr>
+              </a:p>
+            </c:txPr>
+            <c:showLegendKey val="0"/>
+            <c:showVal val="0"/>
+            <c:showCatName val="0"/>
+            <c:showSerName val="0"/>
+            <c:showPercent val="0"/>
+            <c:showBubbleSize val="0"/>
+            <c:showLeaderLines val="0"/>
+          </c:dLbls>
+          <c:dPt>
+            <c:idx val="0"/>
+            <c:invertIfNegative val="0"/>
+            <c:bubble3D val="0"/>
+            <c:spPr>
+              <a:solidFill>
+                <a:srgbClr val="2563eb"/>
+              </a:solidFill>
+              <a:effectLst/>
+            </c:spPr>
+          </c:dPt>
+          <c:dPt>
+            <c:idx val="1"/>
+            <c:invertIfNegative val="0"/>
+            <c:bubble3D val="0"/>
+            <c:spPr>
+              <a:solidFill>
+                <a:srgbClr val="3b82f6"/>
+              </a:solidFill>
+              <a:effectLst/>
+            </c:spPr>
+          </c:dPt>
+          <c:dPt>
+            <c:idx val="2"/>
+            <c:invertIfNegative val="0"/>
+            <c:bubble3D val="0"/>
+            <c:spPr>
+              <a:solidFill>
+                <a:srgbClr val="10b981"/>
+              </a:solidFill>
+              <a:effectLst/>
+            </c:spPr>
+          </c:dPt>
+          <c:dPt>
+            <c:idx val="3"/>
+            <c:invertIfNegative val="0"/>
+            <c:bubble3D val="0"/>
+            <c:spPr>
+              <a:solidFill>
+                <a:srgbClr val="f59e0b"/>
+              </a:solidFill>
+              <a:effectLst/>
+            </c:spPr>
+          </c:dPt>
+          <c:cat>
+            <c:multiLvlStrRef>
+              <c:f>Sheet1!$A$2:$A$5</c:f>
+              <c:multiLvlStrCache>
+                <c:ptCount val="4"/>
+                <c:lvl>
+                  <c:pt idx="0">
+                    <c:v>Q1 2026</c:v>
+                  </c:pt>
+                  <c:pt idx="1">
+                    <c:v>Q2 2026</c:v>
+                  </c:pt>
+                  <c:pt idx="2">
+                    <c:v>Q3 2026</c:v>
+                  </c:pt>
+                  <c:pt idx="3">
+                    <c:v>Q4 2026</c:v>
+                  </c:pt>
+                </c:lvl>
+              </c:multiLvlStrCache>
+            </c:multiLvlStrRef>
+          </c:cat>
+          <c:val>
+            <c:numRef>
+              <c:f>Sheet1!$B$2:$B$5</c:f>
+              <c:numCache>
+                <c:formatCode>General</c:formatCode>
+                <c:ptCount val="4"/>
+                <c:pt idx="0">
+                  <c:v>1.2</c:v>
+                </c:pt>
+                <c:pt idx="1">
+                  <c:v>1.8</c:v>
+                </c:pt>
+                <c:pt idx="2">
+                  <c:v>2.6</c:v>
+                </c:pt>
+                <c:pt idx="3">
+                  <c:v>3.5</c:v>
+                </c:pt>
+              </c:numCache>
+            </c:numRef>
+          </c:val>
+        </c:ser>
+        <c:dLbls>
+          <c:numFmt formatCode="#,##0" sourceLinked="0"/>
+          <c:txPr>
+            <a:bodyPr/>
+            <a:lstStyle/>
+            <a:p>
+              <a:pPr>
+                <a:defRPr b="0" i="0" strike="noStrike" sz="1200" u="none">
+                  <a:solidFill>
+                    <a:srgbClr val="000000"/>
+                  </a:solidFill>
+                  <a:latin typeface="Arial"/>
+                </a:defRPr>
+              </a:pPr>
+            </a:p>
+          </c:txPr>
+          <c:showLegendKey val="0"/>
+          <c:showVal val="0"/>
+          <c:showCatName val="0"/>
+          <c:showSerName val="0"/>
+          <c:showPercent val="0"/>
+          <c:showBubbleSize val="0"/>
+          <c:showLeaderLines val="0"/>
+        </c:dLbls>
+        <c:gapWidth val="150"/>
+        <c:overlap val="0"/>
+        <c:axId val="2094734554"/>
+        <c:axId val="2094734552"/>
+        <c:axId val="2094734556"/>
+      </c:barChart>
+      <c:catAx>
+        <c:axId val="2094734554"/>
+        <c:scaling>
+          <c:orientation val="minMax"/>
+        </c:scaling>
+        <c:delete val="0"/>
+        <c:axPos val="b"/>
+        <c:numFmt formatCode="General" sourceLinked="1"/>
+        <c:majorTickMark val="out"/>
+        <c:minorTickMark val="none"/>
+        <c:tickLblPos val="low"/>
+        <c:spPr>
+          <a:ln w="12700" cap="flat">
+            <a:solidFill>
+              <a:srgbClr val="888888"/>
+            </a:solidFill>
+            <a:prstDash val="solid"/>
+            <a:round/>
+          </a:ln>
+        </c:spPr>
+        <c:txPr>
+          <a:bodyPr/>
+          <a:lstStyle/>
+          <a:p>
+            <a:pPr>
+              <a:defRPr sz="1000" b="0" i="0" u="none" strike="noStrike">
+                <a:solidFill>
+                  <a:srgbClr val="64748B"/>
+                </a:solidFill>
+                <a:latin typeface="Calibri"/>
+              </a:defRPr>
+            </a:pPr>
+            <a:endParaRPr lang="en-US"/>
+          </a:p>
+        </c:txPr>
+        <c:crossAx val="2094734552"/>
+        <c:crosses val="autoZero"/>
+        <c:auto val="1"/>
+        <c:lblAlgn val="ctr"/>
+        <c:noMultiLvlLbl val="1"/>
+      </c:catAx>
+      <c:valAx>
+        <c:axId val="2094734552"/>
+        <c:scaling>
+          <c:orientation val="minMax"/>
+        </c:scaling>
+        <c:delete val="0"/>
+        <c:axPos val="l"/>
+        <c:majorGridlines>
+          <c:spPr>
+            <a:ln w="12700" cap="flat">
+              <a:solidFill>
+                <a:srgbClr val="f8fafc"/>
+              </a:solidFill>
+              <a:prstDash val="dash"/>
+              <a:round/>
+            </a:ln>
+          </c:spPr>
+        </c:majorGridlines>
+        <c:numFmt formatCode="General" sourceLinked="0"/>
+        <c:majorTickMark val="out"/>
+        <c:minorTickMark val="none"/>
+        <c:tickLblPos val="nextTo"/>
+        <c:spPr>
+          <a:ln w="12700" cap="flat">
+            <a:solidFill>
+              <a:srgbClr val="888888"/>
+            </a:solidFill>
+            <a:prstDash val="solid"/>
+            <a:round/>
+          </a:ln>
+        </c:spPr>
+        <c:txPr>
+          <a:bodyPr/>
+          <a:lstStyle/>
+          <a:p>
+            <a:pPr>
+              <a:defRPr sz="1000" b="0" i="0" u="none" strike="noStrike">
+                <a:solidFill>
+                  <a:srgbClr val="64748B"/>
+                </a:solidFill>
+                <a:latin typeface="Calibri"/>
+              </a:defRPr>
+            </a:pPr>
+            <a:endParaRPr lang="en-US"/>
+          </a:p>
+        </c:txPr>
+        <c:crossAx val="2094734554"/>
+        <c:crosses val="autoZero"/>
+        <c:crossBetween val="between"/>
+      </c:valAx>
+      <c:spPr>
+        <a:noFill/>
+        <a:ln>
+          <a:noFill/>
+        </a:ln>
+        <a:effectLst/>
+      </c:spPr>
+    </c:plotArea>
+    <c:plotVisOnly val="1"/>
+    <c:dispBlanksAs val="span"/>
+  </c:chart>
+  <c:spPr>
+    <a:noFill/>
+    <a:ln>
+      <a:noFill/>
+    </a:ln>
+    <a:effectLst/>
+  </c:spPr>
+  <c:externalData r:id="rId1">
+    <c:autoUpdate val="0"/>
+  </c:externalData>
+</c:chartSpace>
+</file>
+
+<file path=ppt/charts/chart2.xml><?xml version="1.0" encoding="utf-8"?>
+<c:chartSpace xmlns:c="http://schemas.openxmlformats.org/drawingml/2006/chart" xmlns:a="http://schemas.openxmlformats.org/drawingml/2006/main" xmlns:r="http://schemas.openxmlformats.org/officeDocument/2006/relationships">
+  <c:date1904 val="0"/>
+  <c:roundedCorners val="1"/>
+  <c:chart>
+    <c:autoTitleDeleted val="1"/>
+    <c:plotArea>
+      <c:layout/>
+      <c:lineChart>
+        <c:varyColors val="0"/>
+        <c:ser>
+          <c:idx val="0"/>
+          <c:order val="0"/>
+          <c:tx>
+            <c:strRef>
+              <c:f>Sheet1!$B$1</c:f>
+              <c:strCache>
+                <c:ptCount val="1"/>
+                <c:pt idx="0">
+                  <c:v>NRR (%)</c:v>
+                </c:pt>
+              </c:strCache>
+            </c:strRef>
+          </c:tx>
+          <c:spPr>
+            <a:solidFill>
+              <a:srgbClr val="2563EB"/>
+            </a:solidFill>
+            <a:ln w="25400" cap="flat">
+              <a:solidFill>
+                <a:srgbClr val="2563EB"/>
+              </a:solidFill>
+              <a:prstDash val="solid"/>
+              <a:round/>
+            </a:ln>
+            <a:effectLst/>
+          </c:spPr>
+          <c:invertIfNegative val="0"/>
+          <c:dLbls>
+            <c:numFmt formatCode="#,##0" sourceLinked="0"/>
+            <c:txPr>
+              <a:bodyPr/>
+              <a:lstStyle/>
+              <a:p>
+                <a:pPr>
+                  <a:defRPr b="0" i="0" strike="noStrike" sz="1200" u="none">
+                    <a:solidFill>
+                      <a:srgbClr val="000000"/>
+                    </a:solidFill>
+                    <a:latin typeface="Arial"/>
+                  </a:defRPr>
+                </a:pPr>
+              </a:p>
+            </c:txPr>
+            <c:showLegendKey val="0"/>
+            <c:showVal val="0"/>
+            <c:showCatName val="0"/>
+            <c:showSerName val="0"/>
+            <c:showPercent val="0"/>
+            <c:showBubbleSize val="0"/>
+            <c:showLeaderLines val="0"/>
+          </c:dLbls>
+          <c:marker>
+            <c:symbol val="circle"/>
+            <c:size val="6"/>
+            <c:spPr>
+              <a:solidFill>
+                <a:srgbClr val="2563EB"/>
+              </a:solidFill>
+              <a:ln w="9525" cap="flat">
+                <a:solidFill>
+                  <a:srgbClr val="2563EB"/>
+                </a:solidFill>
+                <a:prstDash val="solid"/>
+                <a:round/>
+              </a:ln>
+              <a:effectLst/>
+            </c:spPr>
+          </c:marker>
+          <c:cat>
+            <c:multiLvlStrRef>
+              <c:f>Sheet1!$A$2:$A$6</c:f>
+              <c:multiLvlStrCache>
+                <c:ptCount val="5"/>
+                <c:lvl>
+                  <c:pt idx="0">
+                    <c:v>Jan</c:v>
+                  </c:pt>
+                  <c:pt idx="1">
+                    <c:v>Mar</c:v>
+                  </c:pt>
+                  <c:pt idx="2">
+                    <c:v>Jun</c:v>
+                  </c:pt>
+                  <c:pt idx="3">
+                    <c:v>Sep</c:v>
+                  </c:pt>
+                  <c:pt idx="4">
+                    <c:v>Dec</c:v>
+                  </c:pt>
+                </c:lvl>
+              </c:multiLvlStrCache>
+            </c:multiLvlStrRef>
+          </c:cat>
+          <c:val>
+            <c:numRef>
+              <c:f>Sheet1!$B$2:$B$6</c:f>
+              <c:numCache>
+                <c:formatCode>General</c:formatCode>
+                <c:ptCount val="5"/>
+                <c:pt idx="0">
+                  <c:v>104</c:v>
+                </c:pt>
+                <c:pt idx="1">
+                  <c:v>108</c:v>
+                </c:pt>
+                <c:pt idx="2">
+                  <c:v>114</c:v>
+                </c:pt>
+                <c:pt idx="3">
+                  <c:v>121</c:v>
+                </c:pt>
+                <c:pt idx="4">
+                  <c:v>128</c:v>
+                </c:pt>
+              </c:numCache>
+            </c:numRef>
+          </c:val>
+          <c:smooth val="0"/>
+        </c:ser>
+        <c:dLbls>
+          <c:numFmt formatCode="#,##0" sourceLinked="0"/>
+          <c:txPr>
+            <a:bodyPr/>
+            <a:lstStyle/>
+            <a:p>
+              <a:pPr>
+                <a:defRPr b="0" i="0" strike="noStrike" sz="1200" u="none">
+                  <a:solidFill>
+                    <a:srgbClr val="000000"/>
+                  </a:solidFill>
+                  <a:latin typeface="Arial"/>
+                </a:defRPr>
+              </a:pPr>
+            </a:p>
+          </c:txPr>
+          <c:showLegendKey val="0"/>
+          <c:showVal val="0"/>
+          <c:showCatName val="0"/>
+          <c:showSerName val="0"/>
+          <c:showPercent val="0"/>
+          <c:showBubbleSize val="0"/>
+          <c:showLeaderLines val="0"/>
+        </c:dLbls>
+        <c:marker val="1"/>
+        <c:axId val="2094734554"/>
+        <c:axId val="2094734552"/>
+        <c:axId val="2094734556"/>
+      </c:lineChart>
+      <c:catAx>
+        <c:axId val="2094734554"/>
+        <c:scaling>
+          <c:orientation val="minMax"/>
+        </c:scaling>
+        <c:delete val="0"/>
+        <c:axPos val="b"/>
+        <c:numFmt formatCode="General" sourceLinked="1"/>
+        <c:majorTickMark val="out"/>
+        <c:minorTickMark val="none"/>
+        <c:tickLblPos val="low"/>
+        <c:spPr>
+          <a:ln w="12700" cap="flat">
+            <a:solidFill>
+              <a:srgbClr val="888888"/>
+            </a:solidFill>
+            <a:prstDash val="solid"/>
+            <a:round/>
+          </a:ln>
+        </c:spPr>
+        <c:txPr>
+          <a:bodyPr/>
+          <a:lstStyle/>
+          <a:p>
+            <a:pPr>
+              <a:defRPr sz="1000" b="0" i="0" u="none" strike="noStrike">
+                <a:solidFill>
+                  <a:srgbClr val="64748B"/>
+                </a:solidFill>
+                <a:latin typeface="Calibri"/>
+              </a:defRPr>
+            </a:pPr>
+            <a:endParaRPr lang="en-US"/>
+          </a:p>
+        </c:txPr>
+        <c:crossAx val="2094734552"/>
+        <c:crosses val="autoZero"/>
+        <c:auto val="1"/>
+        <c:lblAlgn val="ctr"/>
+        <c:noMultiLvlLbl val="1"/>
+      </c:catAx>
+      <c:valAx>
+        <c:axId val="2094734552"/>
+        <c:scaling>
+          <c:orientation val="minMax"/>
+        </c:scaling>
+        <c:delete val="0"/>
+        <c:axPos val="l"/>
+        <c:majorGridlines>
+          <c:spPr>
+            <a:ln w="12700" cap="flat">
+              <a:solidFill>
+                <a:srgbClr val="f8fafc"/>
+              </a:solidFill>
+              <a:prstDash val="dash"/>
+              <a:round/>
+            </a:ln>
+          </c:spPr>
+        </c:majorGridlines>
+        <c:numFmt formatCode="General" sourceLinked="0"/>
+        <c:majorTickMark val="out"/>
+        <c:minorTickMark val="none"/>
+        <c:tickLblPos val="nextTo"/>
+        <c:spPr>
+          <a:ln w="12700" cap="flat">
+            <a:solidFill>
+              <a:srgbClr val="888888"/>
+            </a:solidFill>
+            <a:prstDash val="solid"/>
+            <a:round/>
+          </a:ln>
+        </c:spPr>
+        <c:txPr>
+          <a:bodyPr/>
+          <a:lstStyle/>
+          <a:p>
+            <a:pPr>
+              <a:defRPr sz="1000" b="0" i="0" u="none" strike="noStrike">
+                <a:solidFill>
+                  <a:srgbClr val="64748B"/>
+                </a:solidFill>
+                <a:latin typeface="Calibri"/>
+              </a:defRPr>
+            </a:pPr>
+            <a:endParaRPr lang="en-US"/>
+          </a:p>
+        </c:txPr>
+        <c:crossAx val="2094734554"/>
+        <c:crosses val="autoZero"/>
+        <c:crossBetween val="between"/>
+      </c:valAx>
+      <c:spPr>
+        <a:noFill/>
+        <a:ln>
+          <a:noFill/>
+        </a:ln>
+        <a:effectLst/>
+      </c:spPr>
+    </c:plotArea>
+    <c:plotVisOnly val="1"/>
+    <c:dispBlanksAs val="span"/>
+  </c:chart>
+  <c:spPr>
+    <a:noFill/>
+    <a:ln>
+      <a:noFill/>
+    </a:ln>
+    <a:effectLst/>
+  </c:spPr>
+  <c:externalData r:id="rId1">
+    <c:autoUpdate val="0"/>
+  </c:externalData>
+</c:chartSpace>
+</file>
+
+<file path=ppt/charts/chart3.xml><?xml version="1.0" encoding="utf-8"?>
+<c:chartSpace xmlns:c="http://schemas.openxmlformats.org/drawingml/2006/chart" xmlns:a="http://schemas.openxmlformats.org/drawingml/2006/main" xmlns:r="http://schemas.openxmlformats.org/officeDocument/2006/relationships">
+  <c:date1904 val="0"/>
+  <c:roundedCorners val="1"/>
+  <c:chart>
+    <c:autoTitleDeleted val="1"/>
+    <c:plotArea>
+      <c:layout/>
+      <c:pieChart>
+        <c:varyColors val="1"/>
+        <c:ser>
+          <c:idx val="0"/>
+          <c:order val="0"/>
+          <c:tx>
+            <c:strRef>
+              <c:f>Sheet1!$B$1</c:f>
+              <c:strCache>
+                <c:ptCount val="1"/>
+                <c:pt idx="0">
+                  <c:v>Revenue Share (%)</c:v>
+                </c:pt>
+              </c:strCache>
+            </c:strRef>
+          </c:tx>
+          <c:spPr>
+            <a:solidFill>
+              <a:schemeClr val="accent1"/>
+            </a:solidFill>
+            <a:ln w="9525" cap="flat">
+              <a:solidFill>
+                <a:srgbClr val="F9F9F9"/>
+              </a:solidFill>
+              <a:prstDash val="solid"/>
+              <a:round/>
+            </a:ln>
+            <a:effectLst/>
+          </c:spPr>
+          <c:dPt>
+            <c:idx val="0"/>
+            <c:bubble3D val="0"/>
+            <c:spPr>
+              <a:solidFill>
+                <a:srgbClr val="2563EB"/>
+              </a:solidFill>
+              <a:effectLst/>
+            </c:spPr>
+          </c:dPt>
+          <c:dPt>
+            <c:idx val="1"/>
+            <c:bubble3D val="0"/>
+            <c:spPr>
+              <a:solidFill>
+                <a:srgbClr val="3B82F6"/>
+              </a:solidFill>
+              <a:effectLst/>
+            </c:spPr>
+          </c:dPt>
+          <c:dPt>
+            <c:idx val="2"/>
+            <c:bubble3D val="0"/>
+            <c:spPr>
+              <a:solidFill>
+                <a:srgbClr val="10B981"/>
+              </a:solidFill>
+              <a:effectLst/>
+            </c:spPr>
+          </c:dPt>
+          <c:dPt>
+            <c:idx val="3"/>
+            <c:bubble3D val="0"/>
+            <c:spPr>
+              <a:solidFill>
+                <a:srgbClr val="F59E0B"/>
+              </a:solidFill>
+              <a:effectLst/>
+            </c:spPr>
+          </c:dPt>
+          <c:dLbls>
+            <c:dLbl>
+              <c:idx val="0"/>
+              <c:numFmt formatCode="0%" sourceLinked="0"/>
+              <c:spPr/>
+              <c:txPr>
+                <a:bodyPr/>
+                <a:lstStyle/>
+                <a:p>
+                  <a:pPr>
+                    <a:defRPr sz="1100" b="0" i="0" u="none" strike="noStrike">
+                      <a:solidFill>
+                        <a:srgbClr val="FFFFFF"/>
+                      </a:solidFill>
+                      <a:latin typeface="Calibri"/>
+                    </a:defRPr>
+                  </a:pPr>
+                </a:p>
+              </c:txPr>
+              <c:showLegendKey val="0"/>
+              <c:showVal val="0"/>
+              <c:showCatName val="0"/>
+              <c:showSerName val="0"/>
+              <c:showPercent val="1"/>
+              <c:showBubbleSize val="0"/>
+            </c:dLbl>
+            <c:dLbl>
+              <c:idx val="1"/>
+              <c:numFmt formatCode="0%" sourceLinked="0"/>
+              <c:spPr/>
+              <c:txPr>
+                <a:bodyPr/>
+                <a:lstStyle/>
+                <a:p>
+                  <a:pPr>
+                    <a:defRPr sz="1100" b="0" i="0" u="none" strike="noStrike">
+                      <a:solidFill>
+                        <a:srgbClr val="FFFFFF"/>
+                      </a:solidFill>
+                      <a:latin typeface="Calibri"/>
+                    </a:defRPr>
+                  </a:pPr>
+                </a:p>
+              </c:txPr>
+              <c:showLegendKey val="0"/>
+              <c:showVal val="0"/>
+              <c:showCatName val="0"/>
+              <c:showSerName val="0"/>
+              <c:showPercent val="1"/>
+              <c:showBubbleSize val="0"/>
+            </c:dLbl>
+            <c:dLbl>
+              <c:idx val="2"/>
+              <c:numFmt formatCode="0%" sourceLinked="0"/>
+              <c:spPr/>
+              <c:txPr>
+                <a:bodyPr/>
+                <a:lstStyle/>
+                <a:p>
+                  <a:pPr>
+                    <a:defRPr sz="1100" b="0" i="0" u="none" strike="noStrike">
+                      <a:solidFill>
+                        <a:srgbClr val="FFFFFF"/>
+                      </a:solidFill>
+                      <a:latin typeface="Calibri"/>
+                    </a:defRPr>
+                  </a:pPr>
+                </a:p>
+              </c:txPr>
+              <c:showLegendKey val="0"/>
+              <c:showVal val="0"/>
+              <c:showCatName val="0"/>
+              <c:showSerName val="0"/>
+              <c:showPercent val="1"/>
+              <c:showBubbleSize val="0"/>
+            </c:dLbl>
+            <c:dLbl>
+              <c:idx val="3"/>
+              <c:numFmt formatCode="0%" sourceLinked="0"/>
+              <c:spPr/>
+              <c:txPr>
+                <a:bodyPr/>
+                <a:lstStyle/>
+                <a:p>
+                  <a:pPr>
+                    <a:defRPr sz="1100" b="0" i="0" u="none" strike="noStrike">
+                      <a:solidFill>
+                        <a:srgbClr val="FFFFFF"/>
+                      </a:solidFill>
+                      <a:latin typeface="Calibri"/>
+                    </a:defRPr>
+                  </a:pPr>
+                </a:p>
+              </c:txPr>
+              <c:showLegendKey val="0"/>
+              <c:showVal val="0"/>
+              <c:showCatName val="0"/>
+              <c:showSerName val="0"/>
+              <c:showPercent val="1"/>
+              <c:showBubbleSize val="0"/>
+            </c:dLbl>
+            <c:numFmt formatCode="0%" sourceLinked="0"/>
+            <c:txPr>
+              <a:bodyPr/>
+              <a:lstStyle/>
+              <a:p>
+                <a:pPr>
+                  <a:defRPr sz="1800" b="0" i="0" u="none" strike="noStrike">
+                    <a:solidFill>
+                      <a:srgbClr val="000000"/>
+                    </a:solidFill>
+                    <a:latin typeface="Arial"/>
+                  </a:defRPr>
+                </a:pPr>
+              </a:p>
+            </c:txPr>
+            <c:dLblPos val="ctr"/>
+            <c:showLegendKey val="0"/>
+            <c:showVal val="0"/>
+            <c:showCatName val="1"/>
+            <c:showSerName val="0"/>
+            <c:showPercent val="1"/>
+            <c:showBubbleSize val="0"/>
+            <c:showLeaderLines val="0"/>
+          </c:dLbls>
+          <c:cat>
+            <c:strRef>
+              <c:f>Sheet1!$A$2:$A$5</c:f>
+              <c:strCache>
+                <c:ptCount val="4"/>
+                <c:pt idx="0">
+                  <c:v>Enterprise API</c:v>
+                </c:pt>
+                <c:pt idx="1">
+                  <c:v>Cloud Workspace</c:v>
+                </c:pt>
+                <c:pt idx="2">
+                  <c:v>Pro Subscriptions</c:v>
+                </c:pt>
+                <c:pt idx="3">
+                  <c:v>Integrations</c:v>
+                </c:pt>
+              </c:strCache>
+            </c:strRef>
+          </c:cat>
+          <c:val>
+            <c:numRef>
+              <c:f>Sheet1!$B$2:$B$5</c:f>
+              <c:numCache>
+                <c:ptCount val="4"/>
+                <c:pt idx="0">
+                  <c:v>45</c:v>
+                </c:pt>
+                <c:pt idx="1">
+                  <c:v>30</c:v>
+                </c:pt>
+                <c:pt idx="2">
+                  <c:v>18</c:v>
+                </c:pt>
+                <c:pt idx="3">
+                  <c:v>7</c:v>
+                </c:pt>
+              </c:numCache>
+            </c:numRef>
+          </c:val>
+        </c:ser>
+        <c:firstSliceAng val="0"/>
+      </c:pieChart>
+      <c:spPr>
+        <a:noFill/>
+        <a:ln>
+          <a:noFill/>
+        </a:ln>
+        <a:effectLst/>
+      </c:spPr>
+    </c:plotArea>
+    <c:legend>
+      <c:legendPos val="b"/>
+      <c:overlay val="0"/>
+      <c:txPr>
+        <a:bodyPr/>
+        <a:lstStyle/>
+        <a:p>
+          <a:pPr>
+            <a:defRPr sz="1100">
+              <a:solidFill>
+                <a:srgbClr val="64748B"/>
+              </a:solidFill>
+              <a:latin typeface="Calibri"/>
+              <a:cs typeface="Calibri"/>
+            </a:defRPr>
+          </a:pPr>
+          <a:endParaRPr lang="en-US"/>
+        </a:p>
+      </c:txPr>
+    </c:legend>
+    <c:plotVisOnly val="1"/>
+    <c:dispBlanksAs val="span"/>
+  </c:chart>
+  <c:spPr>
+    <a:noFill/>
+    <a:ln>
+      <a:noFill/>
+    </a:ln>
+    <a:effectLst/>
+  </c:spPr>
+  <c:externalData r:id="rId1">
+    <c:autoUpdate val="0"/>
+  </c:externalData>
+</c:chartSpace>
 </file>
 
 <file path=ppt/notesMasters/notesMaster1.xml><?xml version="1.0" encoding="utf-8"?>
@@ -505,7 +1358,8 @@
           <a:p>
             <a:r>
               <a:rPr lang="en-US" dirty="0"/>
-              <a:t>Quarterly metric review with native editable charts.</a:t>
+              <a:t>Quarterly metric review with native editable charts.
+Source: 11_native_charts.pdf</a:t>
             </a:r>
             <a:endParaRPr lang="en-US" dirty="0"/>
           </a:p>
@@ -593,7 +1447,8 @@
           <a:p>
             <a:r>
               <a:rPr lang="en-US" dirty="0"/>
-              <a:t>Bar chart demonstrating Q-o-Q ARR expansion.</a:t>
+              <a:t>Bar chart demonstrating Q-o-Q ARR expansion.
+Source: 11_native_charts.pdf</a:t>
             </a:r>
             <a:endParaRPr lang="en-US" dirty="0"/>
           </a:p>
@@ -681,7 +1536,8 @@
           <a:p>
             <a:r>
               <a:rPr lang="en-US" dirty="0"/>
-              <a:t>Line chart tracking NRR trend over six quarters.</a:t>
+              <a:t>Line chart tracking NRR trend over six quarters.
+Source: 11_native_charts.pdf</a:t>
             </a:r>
             <a:endParaRPr lang="en-US" dirty="0"/>
           </a:p>
@@ -769,7 +1625,8 @@
           <a:p>
             <a:r>
               <a:rPr lang="en-US" dirty="0"/>
-              <a:t>Pie chart displaying revenue share distribution.</a:t>
+              <a:t>Pie chart displaying revenue share distribution.
+Source: 11_native_charts.pdf</a:t>
             </a:r>
             <a:endParaRPr lang="en-US" dirty="0"/>
           </a:p>
@@ -1310,9 +2167,66 @@
                 <a:ea typeface="Arial" pitchFamily="34" charset="-122"/>
                 <a:cs typeface="Arial" pitchFamily="34" charset="-120"/>
               </a:rPr>
-              <a:t>Annual Revenue Trajectory By Quarter</a:t>
+              <a:t>ARR Growth from Q1 to Q4</a:t>
             </a:r>
             <a:endParaRPr lang="en-US" sz="3200" dirty="0"/>
+          </a:p>
+        </p:txBody>
+      </p:sp>
+      <p:graphicFrame>
+        <p:nvGraphicFramePr>
+          <p:cNvPr id="4" name="Chart 0" descr=""/>
+          <p:cNvGraphicFramePr/>
+          <p:nvPr/>
+        </p:nvGraphicFramePr>
+        <p:xfrm>
+          <a:off x="914400" y="914400"/>
+          <a:ext cx="10972800" cy="4389120"/>
+        </p:xfrm>
+        <a:graphic xmlns:a="http://schemas.openxmlformats.org/drawingml/2006/main">
+          <a:graphicData uri="http://schemas.openxmlformats.org/drawingml/2006/chart">
+            <c:chart xmlns:c="http://schemas.openxmlformats.org/drawingml/2006/chart" r:id="rId1"/>
+          </a:graphicData>
+        </a:graphic>
+      </p:graphicFrame>
+      <p:sp>
+        <p:nvSpPr>
+          <p:cNvPr id="5" name="Text 1"/>
+          <p:cNvSpPr/>
+          <p:nvPr/>
+        </p:nvSpPr>
+        <p:spPr>
+          <a:xfrm>
+            <a:off x="609600" y="5897880"/>
+            <a:ext cx="10972800" cy="548640"/>
+          </a:xfrm>
+          <a:prstGeom prst="rect">
+            <a:avLst/>
+          </a:prstGeom>
+          <a:noFill/>
+          <a:ln/>
+        </p:spPr>
+        <p:txBody>
+          <a:bodyPr wrap="square" rtlCol="0" anchor="ctr">
+            <a:normAutofit/>
+          </a:bodyPr>
+          <a:lstStyle/>
+          <a:p>
+            <a:pPr algn="ctr" indent="0" marL="0">
+              <a:buNone/>
+            </a:pPr>
+            <a:r>
+              <a:rPr lang="en-US" sz="1500" i="1" dirty="0">
+                <a:solidFill>
+                  <a:srgbClr val="64748B"/>
+                </a:solidFill>
+                <a:latin typeface="Calibri" pitchFamily="34" charset="0"/>
+                <a:ea typeface="Calibri" pitchFamily="34" charset="-122"/>
+                <a:cs typeface="Calibri" pitchFamily="34" charset="-120"/>
+              </a:rPr>
+              <a:t>ARR accelerated consistently across four consecutive fiscal quarters.</a:t>
+            </a:r>
+            <a:endParaRPr lang="en-US" sz="1500" dirty="0"/>
           </a:p>
         </p:txBody>
       </p:sp>
@@ -1382,6 +2296,63 @@
           </a:p>
         </p:txBody>
       </p:sp>
+      <p:graphicFrame>
+        <p:nvGraphicFramePr>
+          <p:cNvPr id="4" name="Chart 0" descr=""/>
+          <p:cNvGraphicFramePr/>
+          <p:nvPr/>
+        </p:nvGraphicFramePr>
+        <p:xfrm>
+          <a:off x="914400" y="914400"/>
+          <a:ext cx="10972800" cy="4389120"/>
+        </p:xfrm>
+        <a:graphic xmlns:a="http://schemas.openxmlformats.org/drawingml/2006/main">
+          <a:graphicData uri="http://schemas.openxmlformats.org/drawingml/2006/chart">
+            <c:chart xmlns:c="http://schemas.openxmlformats.org/drawingml/2006/chart" r:id="rId1"/>
+          </a:graphicData>
+        </a:graphic>
+      </p:graphicFrame>
+      <p:sp>
+        <p:nvSpPr>
+          <p:cNvPr id="5" name="Text 1"/>
+          <p:cNvSpPr/>
+          <p:nvPr/>
+        </p:nvSpPr>
+        <p:spPr>
+          <a:xfrm>
+            <a:off x="609600" y="5897880"/>
+            <a:ext cx="10972800" cy="548640"/>
+          </a:xfrm>
+          <a:prstGeom prst="rect">
+            <a:avLst/>
+          </a:prstGeom>
+          <a:noFill/>
+          <a:ln/>
+        </p:spPr>
+        <p:txBody>
+          <a:bodyPr wrap="square" rtlCol="0" anchor="ctr">
+            <a:normAutofit/>
+          </a:bodyPr>
+          <a:lstStyle/>
+          <a:p>
+            <a:pPr algn="ctr" indent="0" marL="0">
+              <a:buNone/>
+            </a:pPr>
+            <a:r>
+              <a:rPr lang="en-US" sz="1500" i="1" dirty="0">
+                <a:solidFill>
+                  <a:srgbClr val="64748B"/>
+                </a:solidFill>
+                <a:latin typeface="Calibri" pitchFamily="34" charset="0"/>
+                <a:ea typeface="Calibri" pitchFamily="34" charset="-122"/>
+                <a:cs typeface="Calibri" pitchFamily="34" charset="-120"/>
+              </a:rPr>
+              <a:t>Net Revenue Retention steadily increased to 128%.</a:t>
+            </a:r>
+            <a:endParaRPr lang="en-US" sz="1500" dirty="0"/>
+          </a:p>
+        </p:txBody>
+      </p:sp>
     </p:spTree>
   </p:cSld>
   <p:clrMapOvr>
@@ -1445,6 +2416,63 @@
               <a:t>Platform Revenue Breakdown by Product</a:t>
             </a:r>
             <a:endParaRPr lang="en-US" sz="3200" dirty="0"/>
+          </a:p>
+        </p:txBody>
+      </p:sp>
+      <p:graphicFrame>
+        <p:nvGraphicFramePr>
+          <p:cNvPr id="4" name="Chart 0" descr=""/>
+          <p:cNvGraphicFramePr/>
+          <p:nvPr/>
+        </p:nvGraphicFramePr>
+        <p:xfrm>
+          <a:off x="914400" y="914400"/>
+          <a:ext cx="10972800" cy="4389120"/>
+        </p:xfrm>
+        <a:graphic xmlns:a="http://schemas.openxmlformats.org/drawingml/2006/main">
+          <a:graphicData uri="http://schemas.openxmlformats.org/drawingml/2006/chart">
+            <c:chart xmlns:c="http://schemas.openxmlformats.org/drawingml/2006/chart" r:id="rId1"/>
+          </a:graphicData>
+        </a:graphic>
+      </p:graphicFrame>
+      <p:sp>
+        <p:nvSpPr>
+          <p:cNvPr id="5" name="Text 1"/>
+          <p:cNvSpPr/>
+          <p:nvPr/>
+        </p:nvSpPr>
+        <p:spPr>
+          <a:xfrm>
+            <a:off x="609600" y="5897880"/>
+            <a:ext cx="10972800" cy="548640"/>
+          </a:xfrm>
+          <a:prstGeom prst="rect">
+            <a:avLst/>
+          </a:prstGeom>
+          <a:noFill/>
+          <a:ln/>
+        </p:spPr>
+        <p:txBody>
+          <a:bodyPr wrap="square" rtlCol="0" anchor="ctr">
+            <a:normAutofit/>
+          </a:bodyPr>
+          <a:lstStyle/>
+          <a:p>
+            <a:pPr algn="ctr" indent="0" marL="0">
+              <a:buNone/>
+            </a:pPr>
+            <a:r>
+              <a:rPr lang="en-US" sz="1500" i="1" dirty="0">
+                <a:solidFill>
+                  <a:srgbClr val="64748B"/>
+                </a:solidFill>
+                <a:latin typeface="Calibri" pitchFamily="34" charset="0"/>
+                <a:ea typeface="Calibri" pitchFamily="34" charset="-122"/>
+                <a:cs typeface="Calibri" pitchFamily="34" charset="-120"/>
+              </a:rPr>
+              <a:t>Enterprise contracts now account for nearly half of revenue.</a:t>
+            </a:r>
+            <a:endParaRPr lang="en-US" sz="1500" dirty="0"/>
           </a:p>
         </p:txBody>
       </p:sp>
